--- a/classes/parte-17-profundizacion-para-certificaciones/328-gestion-de-riesgos-cuantitativa-y-continuidad-avanzada/clase-328-presentacion.pptx
+++ b/classes/parte-17-profundizacion-para-certificaciones/328-gestion-de-riesgos-cuantitativa-y-continuidad-avanzada/clase-328-presentacion.pptx
@@ -17,6 +17,10 @@
     <p:sldId id="265" r:id="rId16"/>
     <p:sldId id="266" r:id="rId17"/>
     <p:sldId id="267" r:id="rId18"/>
+    <p:sldId id="268" r:id="rId19"/>
+    <p:sldId id="269" r:id="rId20"/>
+    <p:sldId id="270" r:id="rId21"/>
+    <p:sldId id="271" r:id="rId22"/>
   </p:sldIdLst>
   <p:sldSz cx="9144000" cy="6858000" type="screen4x3"/>
   <p:notesSz cx="6858000" cy="9144000"/>
@@ -3198,7 +3202,7 @@
                   <a:srgbClr val="0B3D2E"/>
                 </a:solidFill>
               </a:rPr>
-              <a:t>⚠️ Errores comunes</a:t>
+              <a:t>🧪 Laboratorio guiado — Modelar un riesgo con FAIR + Monte Carlo y derivar la continuidad</a:t>
             </a:r>
           </a:p>
         </p:txBody>
@@ -3236,82 +3240,97 @@
                   <a:srgbClr val="22282E"/>
                 </a:solidFill>
               </a:rPr>
-              <a:t>•  "El ALE me dio un número exacto de 47.312 €" — Falsa precisión. El riesgo es un rango; reporta percentiles con Monte Carlo, no un punto.</a:t>
-            </a:r>
-          </a:p>
-          <a:p>
-            <a:pPr>
-              <a:spcAft>
-                <a:spcPts val="600"/>
-              </a:spcAft>
-            </a:pPr>
-            <a:r>
-              <a:rPr sz="1500">
-                <a:solidFill>
-                  <a:srgbClr val="22282E"/>
-                </a:solidFill>
-              </a:rPr>
-              <a:t>•  "Puse ARO = 1 porque 'seguro pasa'" — Confundes certeza con frecuencia. ARO es tasa anual estimada; usa histórico y rangos.</a:t>
-            </a:r>
-          </a:p>
-          <a:p>
-            <a:pPr>
-              <a:spcAft>
-                <a:spcPts val="600"/>
-              </a:spcAft>
-            </a:pPr>
-            <a:r>
-              <a:rPr sz="1500">
-                <a:solidFill>
-                  <a:srgbClr val="22282E"/>
-                </a:solidFill>
-              </a:rPr>
-              <a:t>•  "Mi FAIR mezcla pérdida primaria y secundaria" — Se sobreestima o infravalora el impacto. Sepáralas: respuesta/restauración vs multas/reputación.</a:t>
-            </a:r>
-          </a:p>
-          <a:p>
-            <a:pPr>
-              <a:spcAft>
-                <a:spcPts val="600"/>
-              </a:spcAft>
-            </a:pPr>
-            <a:r>
-              <a:rPr sz="1500">
-                <a:solidFill>
-                  <a:srgbClr val="22282E"/>
-                </a:solidFill>
-              </a:rPr>
-              <a:t>•  "Definí RTO = 4 h pero el MTD es 2 h" — RTO no puede superar el MTD. Ajusta el RTO o invierte en recuperación más rápida.</a:t>
-            </a:r>
-          </a:p>
-          <a:p>
-            <a:pPr>
-              <a:spcAft>
-                <a:spcPts val="600"/>
-              </a:spcAft>
-            </a:pPr>
-            <a:r>
-              <a:rPr sz="1500">
-                <a:solidFill>
-                  <a:srgbClr val="22282E"/>
-                </a:solidFill>
-              </a:rPr>
-              <a:t>•  "Compré un sitio caliente para un proceso no crítico" — Sobreinversión sin BIA. Deja que el BIA priorice; el gasto en DR sigue al impacto.</a:t>
-            </a:r>
-          </a:p>
-          <a:p>
-            <a:pPr>
-              <a:spcAft>
-                <a:spcPts val="600"/>
-              </a:spcAft>
-            </a:pPr>
-            <a:r>
-              <a:rPr sz="1500">
-                <a:solidFill>
-                  <a:srgbClr val="22282E"/>
-                </a:solidFill>
-              </a:rPr>
-              <a:t>•  "Tengo backups pero nunca probé restaurar" — RPO teórico ≠ recuperación real. Prueba la restauración; un backup no verificado no cumple el RPO.</a:t>
+              <a:t>•  Ejercicio aplicado: cuantificas un riesgo de ransomware sobre un sistema crítico y usas el resultado para diseñar su continuidad.</a:t>
+            </a:r>
+          </a:p>
+          <a:p>
+            <a:pPr>
+              <a:spcAft>
+                <a:spcPts val="600"/>
+              </a:spcAft>
+            </a:pPr>
+            <a:r>
+              <a:rPr sz="1500">
+                <a:solidFill>
+                  <a:srgbClr val="22282E"/>
+                </a:solidFill>
+              </a:rPr>
+              <a:t>•  Define el escenario. Elige un activo (p. ej. la base de datos de pedidos), la amenaza (ransomware) y el efecto (indisponibilidad + posible exfiltración). Escríbelo en una frase de riesgo clara.</a:t>
+            </a:r>
+          </a:p>
+          <a:p>
+            <a:pPr>
+              <a:spcAft>
+                <a:spcPts val="600"/>
+              </a:spcAft>
+            </a:pPr>
+            <a:r>
+              <a:rPr sz="1500">
+                <a:solidFill>
+                  <a:srgbClr val="22282E"/>
+                </a:solidFill>
+              </a:rPr>
+              <a:t>•  Cálculo clásico ALE. Estima AV (valor del activo/proceso), EF (% de pérdida si ocurre) → SLE. Estima ARO a partir del histórico y la exposición → ALE = SLE × ARO. Anota los supuestos.</a:t>
+            </a:r>
+          </a:p>
+          <a:p>
+            <a:pPr>
+              <a:spcAft>
+                <a:spcPts val="600"/>
+              </a:spcAft>
+            </a:pPr>
+            <a:r>
+              <a:rPr sz="1500">
+                <a:solidFill>
+                  <a:srgbClr val="22282E"/>
+                </a:solidFill>
+              </a:rPr>
+              <a:t>•  Descompón con FAIR. Rellena la taxonomía: frecuencia de contacto/amenaza (TEF), vulnerabilidad, y magnitud de pérdida separando pérdida primaria (respuesta, restauración) y secundaria (multas…</a:t>
+            </a:r>
+          </a:p>
+          <a:p>
+            <a:pPr>
+              <a:spcAft>
+                <a:spcPts val="600"/>
+              </a:spcAft>
+            </a:pPr>
+            <a:r>
+              <a:rPr sz="1500">
+                <a:solidFill>
+                  <a:srgbClr val="22282E"/>
+                </a:solidFill>
+              </a:rPr>
+              <a:t>•  Asigna distribuciones. En lugar de puntos, define rangos calibrados (mínimo, más probable, máximo) para LEF y LM. Usa una distribución triangular o PERT.</a:t>
+            </a:r>
+          </a:p>
+          <a:p>
+            <a:pPr>
+              <a:spcAft>
+                <a:spcPts val="600"/>
+              </a:spcAft>
+            </a:pPr>
+            <a:r>
+              <a:rPr sz="1500">
+                <a:solidFill>
+                  <a:srgbClr val="22282E"/>
+                </a:solidFill>
+              </a:rPr>
+              <a:t>•  Corre Monte Carlo. Simula 10.000 iteraciones muestreando las distribuciones y multiplicando LEF × LM. Grafica el histograma y extrae media, percentil 50 y percentil 90 de la pérdida anual.</a:t>
+            </a:r>
+          </a:p>
+          <a:p>
+            <a:pPr>
+              <a:spcAft>
+                <a:spcPts val="600"/>
+              </a:spcAft>
+            </a:pPr>
+            <a:r>
+              <a:rPr sz="1500">
+                <a:solidFill>
+                  <a:srgbClr val="22282E"/>
+                </a:solidFill>
+              </a:rPr>
+              <a:t>•  Decide el control (ROSI). Propón un control (backups inmutables + segmentación). Estima cuánto reduce LEF o LM, recalcula el ALE mitigado y compara: ROSI = (ALEantes − ALEdespués − costecontrol) /…</a:t>
             </a:r>
           </a:p>
         </p:txBody>
@@ -3362,7 +3381,7 @@
                   <a:srgbClr val="0B3D2E"/>
                 </a:solidFill>
               </a:rPr>
-              <a:t>❓ Preguntas frecuentes</a:t>
+              <a:t>✍️ Ejercicios</a:t>
             </a:r>
           </a:p>
         </p:txBody>
@@ -3400,97 +3419,82 @@
                   <a:srgbClr val="22282E"/>
                 </a:solidFill>
               </a:rPr>
-              <a:t>•  ❓ ¿Cuándo uso análisis cualitativo y cuándo cuantitativo?</a:t>
-            </a:r>
-          </a:p>
-          <a:p>
-            <a:pPr>
-              <a:spcAft>
-                <a:spcPts val="600"/>
-              </a:spcAft>
-            </a:pPr>
-            <a:r>
-              <a:rPr sz="1500">
-                <a:solidFill>
-                  <a:srgbClr val="22282E"/>
-                </a:solidFill>
-              </a:rPr>
-              <a:t>•  El cualitativo (matriz de probabilidad × impacto) es rápido para triar y priorizar muchos riesgos. El cuantitativo (ALE/FAIR/Monte Carlo) se reserva para las decisiones donde el dinero importa: justificar una inversión, elegir entre controles o reportar a dirección. Suelen usarse juntos: cualitativo para filtrar, cuantitativo para los pocos que llegan al comité.</a:t>
-            </a:r>
-          </a:p>
-          <a:p>
-            <a:pPr>
-              <a:spcAft>
-                <a:spcPts val="600"/>
-              </a:spcAft>
-            </a:pPr>
-            <a:r>
-              <a:rPr sz="1500">
-                <a:solidFill>
-                  <a:srgbClr val="22282E"/>
-                </a:solidFill>
-              </a:rPr>
-              <a:t>•  ❓ ¿FAIR reemplaza a SLE/ARO/ALE?</a:t>
-            </a:r>
-          </a:p>
-          <a:p>
-            <a:pPr>
-              <a:spcAft>
-                <a:spcPts val="600"/>
-              </a:spcAft>
-            </a:pPr>
-            <a:r>
-              <a:rPr sz="1500">
-                <a:solidFill>
-                  <a:srgbClr val="22282E"/>
-                </a:solidFill>
-              </a:rPr>
-              <a:t>•  No los contradice: los estructura. FAIR descompone la frecuencia y la magnitud en factores más estimables y define un vocabulario consistente. El resultado sigue siendo una pérdida anualizada, pero con una trazabilidad que un ALE improvisado no tiene.</a:t>
-            </a:r>
-          </a:p>
-          <a:p>
-            <a:pPr>
-              <a:spcAft>
-                <a:spcPts val="600"/>
-              </a:spcAft>
-            </a:pPr>
-            <a:r>
-              <a:rPr sz="1500">
-                <a:solidFill>
-                  <a:srgbClr val="22282E"/>
-                </a:solidFill>
-              </a:rPr>
-              <a:t>•  ❓ ¿Por qué Monte Carlo y no una simple multiplicación?</a:t>
-            </a:r>
-          </a:p>
-          <a:p>
-            <a:pPr>
-              <a:spcAft>
-                <a:spcPts val="600"/>
-              </a:spcAft>
-            </a:pPr>
-            <a:r>
-              <a:rPr sz="1500">
-                <a:solidFill>
-                  <a:srgbClr val="22282E"/>
-                </a:solidFill>
-              </a:rPr>
-              <a:t>•  Porque las entradas son inciertas. Multiplicar los valores "más probables" ignora las colas: la simulación combina las distribuciones y muestra la probabilidad de escenarios extremos (el percentil 90/95), que es justo lo que preocupa a un comité de riesgos.</a:t>
-            </a:r>
-          </a:p>
-          <a:p>
-            <a:pPr>
-              <a:spcAft>
-                <a:spcPts val="600"/>
-              </a:spcAft>
-            </a:pPr>
-            <a:r>
-              <a:rPr sz="1500">
-                <a:solidFill>
-                  <a:srgbClr val="22282E"/>
-                </a:solidFill>
-              </a:rPr>
-              <a:t>•  ❓ ¿Qué diferencia hay entre RTO y RPO?</a:t>
+              <a:t>•  Calcula el ALE de un escenario dado (AV, EF, ARO) y explica qué pasa con el ALE si el ARO se duplica.</a:t>
+            </a:r>
+          </a:p>
+          <a:p>
+            <a:pPr>
+              <a:spcAft>
+                <a:spcPts val="600"/>
+              </a:spcAft>
+            </a:pPr>
+            <a:r>
+              <a:rPr sz="1500">
+                <a:solidFill>
+                  <a:srgbClr val="22282E"/>
+                </a:solidFill>
+              </a:rPr>
+              <a:t>•  Descompón un riesgo de fuga de datos con la taxonomía FAIR, separando pérdida primaria y secundaria.</a:t>
+            </a:r>
+          </a:p>
+          <a:p>
+            <a:pPr>
+              <a:spcAft>
+                <a:spcPts val="600"/>
+              </a:spcAft>
+            </a:pPr>
+            <a:r>
+              <a:rPr sz="1500">
+                <a:solidFill>
+                  <a:srgbClr val="22282E"/>
+                </a:solidFill>
+              </a:rPr>
+              <a:t>•  Justifica por qué un único número de pérdida es engañoso y qué aporta reportar el percentil 90.</a:t>
+            </a:r>
+          </a:p>
+          <a:p>
+            <a:pPr>
+              <a:spcAft>
+                <a:spcPts val="600"/>
+              </a:spcAft>
+            </a:pPr>
+            <a:r>
+              <a:rPr sz="1500">
+                <a:solidFill>
+                  <a:srgbClr val="22282E"/>
+                </a:solidFill>
+              </a:rPr>
+              <a:t>•  Construye un mini Monte Carlo (100 filas en hoja de cálculo o 20 líneas de Python) para una pérdida triangular.</a:t>
+            </a:r>
+          </a:p>
+          <a:p>
+            <a:pPr>
+              <a:spcAft>
+                <a:spcPts val="600"/>
+              </a:spcAft>
+            </a:pPr>
+            <a:r>
+              <a:rPr sz="1500">
+                <a:solidFill>
+                  <a:srgbClr val="22282E"/>
+                </a:solidFill>
+              </a:rPr>
+              <a:t>•  Dado un proceso con MTD de 24 h, propón RTO y RPO coherentes y la estrategia de sitio que los cumple.</a:t>
+            </a:r>
+          </a:p>
+          <a:p>
+            <a:pPr>
+              <a:spcAft>
+                <a:spcPts val="600"/>
+              </a:spcAft>
+            </a:pPr>
+            <a:r>
+              <a:rPr sz="1500">
+                <a:solidFill>
+                  <a:srgbClr val="22282E"/>
+                </a:solidFill>
+              </a:rPr>
+              <a:t>•  Compara tres controles por su ROSI y recomienda cuál financiar primero.</a:t>
             </a:r>
           </a:p>
         </p:txBody>
@@ -3541,7 +3545,7 @@
                   <a:srgbClr val="0B3D2E"/>
                 </a:solidFill>
               </a:rPr>
-              <a:t>🔗 Referencias</a:t>
+              <a:t>📝 Reto verificable</a:t>
             </a:r>
           </a:p>
         </p:txBody>
@@ -3579,6 +3583,528 @@
                   <a:srgbClr val="22282E"/>
                 </a:solidFill>
               </a:rPr>
+              <a:t>•  Reto: entrega un análisis de riesgo cuantitativo de un proceso crítico que termine en una estrategia de continuidad justificada.</a:t>
+            </a:r>
+          </a:p>
+          <a:p>
+            <a:pPr>
+              <a:spcAft>
+                <a:spcPts val="600"/>
+              </a:spcAft>
+            </a:pPr>
+            <a:r>
+              <a:rPr sz="1500">
+                <a:solidFill>
+                  <a:srgbClr val="22282E"/>
+                </a:solidFill>
+              </a:rPr>
+              <a:t>•  Criterio de aceptación:</a:t>
+            </a:r>
+          </a:p>
+          <a:p>
+            <a:pPr>
+              <a:spcAft>
+                <a:spcPts val="600"/>
+              </a:spcAft>
+            </a:pPr>
+            <a:r>
+              <a:rPr sz="1500">
+                <a:solidFill>
+                  <a:srgbClr val="22282E"/>
+                </a:solidFill>
+              </a:rPr>
+              <a:t>•  Hay un ALE clásico (SLE × ARO) con supuestos documentados y un modelo FAIR de los mismos factores.</a:t>
+            </a:r>
+          </a:p>
+          <a:p>
+            <a:pPr>
+              <a:spcAft>
+                <a:spcPts val="600"/>
+              </a:spcAft>
+            </a:pPr>
+            <a:r>
+              <a:rPr sz="1500">
+                <a:solidFill>
+                  <a:srgbClr val="22282E"/>
+                </a:solidFill>
+              </a:rPr>
+              <a:t>•  La incertidumbre se modela con distribuciones y una simulación de Monte Carlo, reportando al menos el percentil 90 de pérdida anual.</a:t>
+            </a:r>
+          </a:p>
+          <a:p>
+            <a:pPr>
+              <a:spcAft>
+                <a:spcPts val="600"/>
+              </a:spcAft>
+            </a:pPr>
+            <a:r>
+              <a:rPr sz="1500">
+                <a:solidFill>
+                  <a:srgbClr val="22282E"/>
+                </a:solidFill>
+              </a:rPr>
+              <a:t>•  Existe un análisis ROSI que compara el coste del control contra la reducción de ALE, con una recomendación clara.</a:t>
+            </a:r>
+          </a:p>
+          <a:p>
+            <a:pPr>
+              <a:spcAft>
+                <a:spcPts val="600"/>
+              </a:spcAft>
+            </a:pPr>
+            <a:r>
+              <a:rPr sz="1500">
+                <a:solidFill>
+                  <a:srgbClr val="22282E"/>
+                </a:solidFill>
+              </a:rPr>
+              <a:t>•  El BIA deriva RTO, RPO y MTD del proceso, y se verifica que RTO ≤ MTD.</a:t>
+            </a:r>
+          </a:p>
+          <a:p>
+            <a:pPr>
+              <a:spcAft>
+                <a:spcPts val="600"/>
+              </a:spcAft>
+            </a:pPr>
+            <a:r>
+              <a:rPr sz="1500">
+                <a:solidFill>
+                  <a:srgbClr val="22282E"/>
+                </a:solidFill>
+              </a:rPr>
+              <a:t>•  La estrategia de continuidad/DR (sitio, backups, orden de recuperación) es coherente con los RTO/RPO y su coste se justifica frente al ALE.</a:t>
+            </a:r>
+          </a:p>
+        </p:txBody>
+      </p:sp>
+    </p:spTree>
+  </p:cSld>
+  <p:clrMapOvr>
+    <a:masterClrMapping/>
+  </p:clrMapOvr>
+</p:sld>
+</file>
+
+<file path=ppt/slides/slide13.xml><?xml version="1.0" encoding="utf-8"?>
+<p:sld xmlns:a="http://schemas.openxmlformats.org/drawingml/2006/main" xmlns:p="http://schemas.openxmlformats.org/presentationml/2006/main" xmlns:r="http://schemas.openxmlformats.org/officeDocument/2006/relationships">
+  <p:cSld>
+    <p:spTree>
+      <p:nvGrpSpPr>
+        <p:cNvPr id="1" name=""/>
+        <p:cNvGrpSpPr/>
+        <p:nvPr/>
+      </p:nvGrpSpPr>
+      <p:grpSpPr/>
+      <p:sp>
+        <p:nvSpPr>
+          <p:cNvPr id="2" name="TextBox 1"/>
+          <p:cNvSpPr txBox="1"/>
+          <p:nvPr/>
+        </p:nvSpPr>
+        <p:spPr>
+          <a:xfrm>
+            <a:off x="457200" y="320040"/>
+            <a:ext cx="8229600" cy="822960"/>
+          </a:xfrm>
+          <a:prstGeom prst="rect">
+            <a:avLst/>
+          </a:prstGeom>
+          <a:noFill/>
+        </p:spPr>
+        <p:txBody>
+          <a:bodyPr wrap="square">
+            <a:spAutoFit/>
+          </a:bodyPr>
+          <a:lstStyle/>
+          <a:p>
+            <a:r>
+              <a:rPr sz="2600" b="1">
+                <a:solidFill>
+                  <a:srgbClr val="0B3D2E"/>
+                </a:solidFill>
+              </a:rPr>
+              <a:t>⚠️ Errores comunes</a:t>
+            </a:r>
+          </a:p>
+        </p:txBody>
+      </p:sp>
+      <p:sp>
+        <p:nvSpPr>
+          <p:cNvPr id="3" name="TextBox 2"/>
+          <p:cNvSpPr txBox="1"/>
+          <p:nvPr/>
+        </p:nvSpPr>
+        <p:spPr>
+          <a:xfrm>
+            <a:off x="457200" y="1280160"/>
+            <a:ext cx="8229600" cy="4937760"/>
+          </a:xfrm>
+          <a:prstGeom prst="rect">
+            <a:avLst/>
+          </a:prstGeom>
+          <a:noFill/>
+        </p:spPr>
+        <p:txBody>
+          <a:bodyPr wrap="square">
+            <a:spAutoFit/>
+          </a:bodyPr>
+          <a:lstStyle/>
+          <a:p>
+            <a:pPr>
+              <a:spcAft>
+                <a:spcPts val="600"/>
+              </a:spcAft>
+            </a:pPr>
+            <a:r>
+              <a:rPr sz="1500">
+                <a:solidFill>
+                  <a:srgbClr val="22282E"/>
+                </a:solidFill>
+              </a:rPr>
+              <a:t>•  "El ALE me dio un número exacto de 47.312 €" — Falsa precisión. El riesgo es un rango; reporta percentiles con Monte Carlo, no un punto.</a:t>
+            </a:r>
+          </a:p>
+          <a:p>
+            <a:pPr>
+              <a:spcAft>
+                <a:spcPts val="600"/>
+              </a:spcAft>
+            </a:pPr>
+            <a:r>
+              <a:rPr sz="1500">
+                <a:solidFill>
+                  <a:srgbClr val="22282E"/>
+                </a:solidFill>
+              </a:rPr>
+              <a:t>•  "Puse ARO = 1 porque 'seguro pasa'" — Confundes certeza con frecuencia. ARO es tasa anual estimada; usa histórico y rangos.</a:t>
+            </a:r>
+          </a:p>
+          <a:p>
+            <a:pPr>
+              <a:spcAft>
+                <a:spcPts val="600"/>
+              </a:spcAft>
+            </a:pPr>
+            <a:r>
+              <a:rPr sz="1500">
+                <a:solidFill>
+                  <a:srgbClr val="22282E"/>
+                </a:solidFill>
+              </a:rPr>
+              <a:t>•  "Mi FAIR mezcla pérdida primaria y secundaria" — Se sobreestima o infravalora el impacto. Sepáralas: respuesta/restauración vs multas/reputación.</a:t>
+            </a:r>
+          </a:p>
+          <a:p>
+            <a:pPr>
+              <a:spcAft>
+                <a:spcPts val="600"/>
+              </a:spcAft>
+            </a:pPr>
+            <a:r>
+              <a:rPr sz="1500">
+                <a:solidFill>
+                  <a:srgbClr val="22282E"/>
+                </a:solidFill>
+              </a:rPr>
+              <a:t>•  "Definí RTO = 4 h pero el MTD es 2 h" — RTO no puede superar el MTD. Ajusta el RTO o invierte en recuperación más rápida.</a:t>
+            </a:r>
+          </a:p>
+          <a:p>
+            <a:pPr>
+              <a:spcAft>
+                <a:spcPts val="600"/>
+              </a:spcAft>
+            </a:pPr>
+            <a:r>
+              <a:rPr sz="1500">
+                <a:solidFill>
+                  <a:srgbClr val="22282E"/>
+                </a:solidFill>
+              </a:rPr>
+              <a:t>•  "Compré un sitio caliente para un proceso no crítico" — Sobreinversión sin BIA. Deja que el BIA priorice; el gasto en DR sigue al impacto.</a:t>
+            </a:r>
+          </a:p>
+          <a:p>
+            <a:pPr>
+              <a:spcAft>
+                <a:spcPts val="600"/>
+              </a:spcAft>
+            </a:pPr>
+            <a:r>
+              <a:rPr sz="1500">
+                <a:solidFill>
+                  <a:srgbClr val="22282E"/>
+                </a:solidFill>
+              </a:rPr>
+              <a:t>•  "Tengo backups pero nunca probé restaurar" — RPO teórico ≠ recuperación real. Prueba la restauración; un backup no verificado no cumple el RPO.</a:t>
+            </a:r>
+          </a:p>
+        </p:txBody>
+      </p:sp>
+    </p:spTree>
+  </p:cSld>
+  <p:clrMapOvr>
+    <a:masterClrMapping/>
+  </p:clrMapOvr>
+</p:sld>
+</file>
+
+<file path=ppt/slides/slide14.xml><?xml version="1.0" encoding="utf-8"?>
+<p:sld xmlns:a="http://schemas.openxmlformats.org/drawingml/2006/main" xmlns:p="http://schemas.openxmlformats.org/presentationml/2006/main" xmlns:r="http://schemas.openxmlformats.org/officeDocument/2006/relationships">
+  <p:cSld>
+    <p:spTree>
+      <p:nvGrpSpPr>
+        <p:cNvPr id="1" name=""/>
+        <p:cNvGrpSpPr/>
+        <p:nvPr/>
+      </p:nvGrpSpPr>
+      <p:grpSpPr/>
+      <p:sp>
+        <p:nvSpPr>
+          <p:cNvPr id="2" name="TextBox 1"/>
+          <p:cNvSpPr txBox="1"/>
+          <p:nvPr/>
+        </p:nvSpPr>
+        <p:spPr>
+          <a:xfrm>
+            <a:off x="457200" y="320040"/>
+            <a:ext cx="8229600" cy="822960"/>
+          </a:xfrm>
+          <a:prstGeom prst="rect">
+            <a:avLst/>
+          </a:prstGeom>
+          <a:noFill/>
+        </p:spPr>
+        <p:txBody>
+          <a:bodyPr wrap="square">
+            <a:spAutoFit/>
+          </a:bodyPr>
+          <a:lstStyle/>
+          <a:p>
+            <a:r>
+              <a:rPr sz="2600" b="1">
+                <a:solidFill>
+                  <a:srgbClr val="0B3D2E"/>
+                </a:solidFill>
+              </a:rPr>
+              <a:t>❓ Preguntas frecuentes</a:t>
+            </a:r>
+          </a:p>
+        </p:txBody>
+      </p:sp>
+      <p:sp>
+        <p:nvSpPr>
+          <p:cNvPr id="3" name="TextBox 2"/>
+          <p:cNvSpPr txBox="1"/>
+          <p:nvPr/>
+        </p:nvSpPr>
+        <p:spPr>
+          <a:xfrm>
+            <a:off x="457200" y="1280160"/>
+            <a:ext cx="8229600" cy="4937760"/>
+          </a:xfrm>
+          <a:prstGeom prst="rect">
+            <a:avLst/>
+          </a:prstGeom>
+          <a:noFill/>
+        </p:spPr>
+        <p:txBody>
+          <a:bodyPr wrap="square">
+            <a:spAutoFit/>
+          </a:bodyPr>
+          <a:lstStyle/>
+          <a:p>
+            <a:pPr>
+              <a:spcAft>
+                <a:spcPts val="600"/>
+              </a:spcAft>
+            </a:pPr>
+            <a:r>
+              <a:rPr sz="1500">
+                <a:solidFill>
+                  <a:srgbClr val="22282E"/>
+                </a:solidFill>
+              </a:rPr>
+              <a:t>•  ❓ ¿Cuándo uso análisis cualitativo y cuándo cuantitativo?</a:t>
+            </a:r>
+          </a:p>
+          <a:p>
+            <a:pPr>
+              <a:spcAft>
+                <a:spcPts val="600"/>
+              </a:spcAft>
+            </a:pPr>
+            <a:r>
+              <a:rPr sz="1500">
+                <a:solidFill>
+                  <a:srgbClr val="22282E"/>
+                </a:solidFill>
+              </a:rPr>
+              <a:t>•  El cualitativo (matriz de probabilidad × impacto) es rápido para triar y priorizar muchos riesgos. El cuantitativo (ALE/FAIR/Monte Carlo) se reserva para las decisiones donde el dinero importa…</a:t>
+            </a:r>
+          </a:p>
+          <a:p>
+            <a:pPr>
+              <a:spcAft>
+                <a:spcPts val="600"/>
+              </a:spcAft>
+            </a:pPr>
+            <a:r>
+              <a:rPr sz="1500">
+                <a:solidFill>
+                  <a:srgbClr val="22282E"/>
+                </a:solidFill>
+              </a:rPr>
+              <a:t>•  ❓ ¿FAIR reemplaza a SLE/ARO/ALE?</a:t>
+            </a:r>
+          </a:p>
+          <a:p>
+            <a:pPr>
+              <a:spcAft>
+                <a:spcPts val="600"/>
+              </a:spcAft>
+            </a:pPr>
+            <a:r>
+              <a:rPr sz="1500">
+                <a:solidFill>
+                  <a:srgbClr val="22282E"/>
+                </a:solidFill>
+              </a:rPr>
+              <a:t>•  No los contradice: los estructura. FAIR descompone la frecuencia y la magnitud en factores más estimables y define un vocabulario consistente. El resultado sigue siendo una pérdida anualizada, pero…</a:t>
+            </a:r>
+          </a:p>
+          <a:p>
+            <a:pPr>
+              <a:spcAft>
+                <a:spcPts val="600"/>
+              </a:spcAft>
+            </a:pPr>
+            <a:r>
+              <a:rPr sz="1500">
+                <a:solidFill>
+                  <a:srgbClr val="22282E"/>
+                </a:solidFill>
+              </a:rPr>
+              <a:t>•  ❓ ¿Por qué Monte Carlo y no una simple multiplicación?</a:t>
+            </a:r>
+          </a:p>
+          <a:p>
+            <a:pPr>
+              <a:spcAft>
+                <a:spcPts val="600"/>
+              </a:spcAft>
+            </a:pPr>
+            <a:r>
+              <a:rPr sz="1500">
+                <a:solidFill>
+                  <a:srgbClr val="22282E"/>
+                </a:solidFill>
+              </a:rPr>
+              <a:t>•  Porque las entradas son inciertas. Multiplicar los valores "más probables" ignora las colas: la simulación combina las distribuciones y muestra la probabilidad de escenarios extremos (el percentil…</a:t>
+            </a:r>
+          </a:p>
+          <a:p>
+            <a:pPr>
+              <a:spcAft>
+                <a:spcPts val="600"/>
+              </a:spcAft>
+            </a:pPr>
+            <a:r>
+              <a:rPr sz="1500">
+                <a:solidFill>
+                  <a:srgbClr val="22282E"/>
+                </a:solidFill>
+              </a:rPr>
+              <a:t>•  ❓ ¿Qué diferencia hay entre RTO y RPO?</a:t>
+            </a:r>
+          </a:p>
+        </p:txBody>
+      </p:sp>
+    </p:spTree>
+  </p:cSld>
+  <p:clrMapOvr>
+    <a:masterClrMapping/>
+  </p:clrMapOvr>
+</p:sld>
+</file>
+
+<file path=ppt/slides/slide15.xml><?xml version="1.0" encoding="utf-8"?>
+<p:sld xmlns:a="http://schemas.openxmlformats.org/drawingml/2006/main" xmlns:p="http://schemas.openxmlformats.org/presentationml/2006/main" xmlns:r="http://schemas.openxmlformats.org/officeDocument/2006/relationships">
+  <p:cSld>
+    <p:spTree>
+      <p:nvGrpSpPr>
+        <p:cNvPr id="1" name=""/>
+        <p:cNvGrpSpPr/>
+        <p:nvPr/>
+      </p:nvGrpSpPr>
+      <p:grpSpPr/>
+      <p:sp>
+        <p:nvSpPr>
+          <p:cNvPr id="2" name="TextBox 1"/>
+          <p:cNvSpPr txBox="1"/>
+          <p:nvPr/>
+        </p:nvSpPr>
+        <p:spPr>
+          <a:xfrm>
+            <a:off x="457200" y="320040"/>
+            <a:ext cx="8229600" cy="822960"/>
+          </a:xfrm>
+          <a:prstGeom prst="rect">
+            <a:avLst/>
+          </a:prstGeom>
+          <a:noFill/>
+        </p:spPr>
+        <p:txBody>
+          <a:bodyPr wrap="square">
+            <a:spAutoFit/>
+          </a:bodyPr>
+          <a:lstStyle/>
+          <a:p>
+            <a:r>
+              <a:rPr sz="2600" b="1">
+                <a:solidFill>
+                  <a:srgbClr val="0B3D2E"/>
+                </a:solidFill>
+              </a:rPr>
+              <a:t>🔗 Referencias</a:t>
+            </a:r>
+          </a:p>
+        </p:txBody>
+      </p:sp>
+      <p:sp>
+        <p:nvSpPr>
+          <p:cNvPr id="3" name="TextBox 2"/>
+          <p:cNvSpPr txBox="1"/>
+          <p:nvPr/>
+        </p:nvSpPr>
+        <p:spPr>
+          <a:xfrm>
+            <a:off x="457200" y="1280160"/>
+            <a:ext cx="8229600" cy="4937760"/>
+          </a:xfrm>
+          <a:prstGeom prst="rect">
+            <a:avLst/>
+          </a:prstGeom>
+          <a:noFill/>
+        </p:spPr>
+        <p:txBody>
+          <a:bodyPr wrap="square">
+            <a:spAutoFit/>
+          </a:bodyPr>
+          <a:lstStyle/>
+          <a:p>
+            <a:pPr>
+              <a:spcAft>
+                <a:spcPts val="600"/>
+              </a:spcAft>
+            </a:pPr>
+            <a:r>
+              <a:rPr sz="1500">
+                <a:solidFill>
+                  <a:srgbClr val="22282E"/>
+                </a:solidFill>
+              </a:rPr>
               <a:t>•  Chapple, Stewart &amp; Gibson. (ISC)² CISSP Official Study Guide, 9.ª ed., Sybex — Security and Risk Management y Business Continuity Planning.</a:t>
             </a:r>
           </a:p>
@@ -3644,6 +4170,81 @@
           </a:p>
         </p:txBody>
       </p:sp>
+    </p:spTree>
+  </p:cSld>
+  <p:clrMapOvr>
+    <a:masterClrMapping/>
+  </p:clrMapOvr>
+</p:sld>
+</file>
+
+<file path=ppt/slides/slide16.xml><?xml version="1.0" encoding="utf-8"?>
+<p:sld xmlns:a="http://schemas.openxmlformats.org/drawingml/2006/main" xmlns:p="http://schemas.openxmlformats.org/presentationml/2006/main" xmlns:r="http://schemas.openxmlformats.org/officeDocument/2006/relationships">
+  <p:cSld>
+    <p:spTree>
+      <p:nvGrpSpPr>
+        <p:cNvPr id="1" name=""/>
+        <p:cNvGrpSpPr/>
+        <p:nvPr/>
+      </p:nvGrpSpPr>
+      <p:grpSpPr/>
+      <p:sp>
+        <p:nvSpPr>
+          <p:cNvPr id="2" name="TextBox 1"/>
+          <p:cNvSpPr txBox="1"/>
+          <p:nvPr/>
+        </p:nvSpPr>
+        <p:spPr>
+          <a:xfrm>
+            <a:off x="457200" y="274320"/>
+            <a:ext cx="8229600" cy="640080"/>
+          </a:xfrm>
+          <a:prstGeom prst="rect">
+            <a:avLst/>
+          </a:prstGeom>
+          <a:noFill/>
+        </p:spPr>
+        <p:txBody>
+          <a:bodyPr wrap="square">
+            <a:spAutoFit/>
+          </a:bodyPr>
+          <a:lstStyle/>
+          <a:p>
+            <a:r>
+              <a:rPr sz="2200" b="1">
+                <a:solidFill>
+                  <a:srgbClr val="0B3D2E"/>
+                </a:solidFill>
+              </a:rPr>
+              <a:t>Diagrama de la clase</a:t>
+            </a:r>
+          </a:p>
+        </p:txBody>
+      </p:sp>
+      <p:pic>
+        <p:nvPicPr>
+          <p:cNvPr id="3" name="Picture 2" descr="4846d424ce6a5397.png"/>
+          <p:cNvPicPr>
+            <a:picLocks noChangeAspect="1"/>
+          </p:cNvPicPr>
+          <p:nvPr/>
+        </p:nvPicPr>
+        <p:blipFill>
+          <a:blip r:embed="rId2"/>
+          <a:stretch>
+            <a:fillRect/>
+          </a:stretch>
+        </p:blipFill>
+        <p:spPr>
+          <a:xfrm>
+            <a:off x="457200" y="3343926"/>
+            <a:ext cx="8229600" cy="810227"/>
+          </a:xfrm>
+          <a:prstGeom prst="rect">
+            <a:avLst/>
+          </a:prstGeom>
+        </p:spPr>
+      </p:pic>
     </p:spTree>
   </p:cSld>
   <p:clrMapOvr>
@@ -3728,7 +4329,7 @@
                   <a:srgbClr val="22282E"/>
                 </a:solidFill>
               </a:rPr>
-              <a:t>•  Pasar del riesgo "por colores" (alto/medio/bajo) al riesgo medido en dinero. Esta clase enseña a cuantificar el riesgo con el modelo FAIR (Factor Analysis of Information Risk) y las métricas clásicas de CISSP —SLE, ARO y ALE—, a manejar la incertidumbre con simulación de Monte Carlo, y a conectar ese análisis con la continuidad del negocio: un BIA (Business Impact Analysis) que fija RTO y RPO, y las estrategias de continuidad (BCP) y recuperación ante desastres (DR). Es el núcleo cuantitativo del dominio Security and Risk Management de CISSP.</a:t>
+              <a:t>•  Pasar del riesgo "por colores" (alto/medio/bajo) al riesgo medido en dinero. Esta clase enseña a cuantificar el riesgo con el modelo FAIR (Factor Analysis of Information Risk) y las métricas clásicas…</a:t>
             </a:r>
           </a:p>
         </p:txBody>
@@ -4122,7 +4723,7 @@
                   <a:srgbClr val="0B3D2E"/>
                 </a:solidFill>
               </a:rPr>
-              <a:t>📖 Definiciones y características</a:t>
+              <a:t>🧠 Modelo mental y caso de decisión</a:t>
             </a:r>
           </a:p>
         </p:txBody>
@@ -4160,97 +4761,22 @@
                   <a:srgbClr val="22282E"/>
                 </a:solidFill>
               </a:rPr>
-              <a:t>•  SLE (Single Loss Expectancy): pérdida esperada de un solo evento. SLE = valor del activo (AV) × factor de exposición (EF). Característica clave: mide el impacto de un incidente, no del año.</a:t>
-            </a:r>
-          </a:p>
-          <a:p>
-            <a:pPr>
-              <a:spcAft>
-                <a:spcPts val="600"/>
-              </a:spcAft>
-            </a:pPr>
-            <a:r>
-              <a:rPr sz="1500">
-                <a:solidFill>
-                  <a:srgbClr val="22282E"/>
-                </a:solidFill>
-              </a:rPr>
-              <a:t>•  ARO (Annualized Rate of Occurrence): número esperado de veces que el evento ocurre en un año (p. ej. 0,1 = una vez cada diez años). Característica clave: expresa la frecuencia como tasa anual.</a:t>
-            </a:r>
-          </a:p>
-          <a:p>
-            <a:pPr>
-              <a:spcAft>
-                <a:spcPts val="600"/>
-              </a:spcAft>
-            </a:pPr>
-            <a:r>
-              <a:rPr sz="1500">
-                <a:solidFill>
-                  <a:srgbClr val="22282E"/>
-                </a:solidFill>
-              </a:rPr>
-              <a:t>•  ALE (Annualized Loss Expectancy): pérdida esperada por año. ALE = SLE × ARO. Característica clave: es la métrica que se compara contra el coste de los controles.</a:t>
-            </a:r>
-          </a:p>
-          <a:p>
-            <a:pPr>
-              <a:spcAft>
-                <a:spcPts val="600"/>
-              </a:spcAft>
-            </a:pPr>
-            <a:r>
-              <a:rPr sz="1500">
-                <a:solidFill>
-                  <a:srgbClr val="22282E"/>
-                </a:solidFill>
-              </a:rPr>
-              <a:t>•  FAIR: marco abierto (The Open Group) que descompone el Riesgo = Frecuencia de eventos de pérdida (LEF) × Magnitud de pérdida (LM), y a su vez LEF en frecuencia de amenaza y vulnerabilidad. Característica clave: hace el análisis repetible y defendible, con definiciones consistentes.</a:t>
-            </a:r>
-          </a:p>
-          <a:p>
-            <a:pPr>
-              <a:spcAft>
-                <a:spcPts val="600"/>
-              </a:spcAft>
-            </a:pPr>
-            <a:r>
-              <a:rPr sz="1500">
-                <a:solidFill>
-                  <a:srgbClr val="22282E"/>
-                </a:solidFill>
-              </a:rPr>
-              <a:t>•  Monte Carlo: técnica que muestrea miles de veces las distribuciones de entrada para producir una distribución de salida. Característica clave: entrega percentiles (p. ej. pérdida en el percentil 90) en lugar de un único valor engañoso.</a:t>
-            </a:r>
-          </a:p>
-          <a:p>
-            <a:pPr>
-              <a:spcAft>
-                <a:spcPts val="600"/>
-              </a:spcAft>
-            </a:pPr>
-            <a:r>
-              <a:rPr sz="1500">
-                <a:solidFill>
-                  <a:srgbClr val="22282E"/>
-                </a:solidFill>
-              </a:rPr>
-              <a:t>•  BIA (Business Impact Analysis): análisis que identifica procesos críticos y el impacto —económico, legal, reputacional— de su interrupción en el tiempo. Característica clave: es la entrada que justifica las inversiones en continuidad.</a:t>
-            </a:r>
-          </a:p>
-          <a:p>
-            <a:pPr>
-              <a:spcAft>
-                <a:spcPts val="600"/>
-              </a:spcAft>
-            </a:pPr>
-            <a:r>
-              <a:rPr sz="1500">
-                <a:solidFill>
-                  <a:srgbClr val="22282E"/>
-                </a:solidFill>
-              </a:rPr>
-              <a:t>•  RTO (Recovery Time Objective): tiempo máximo tolerable para restaurar un proceso tras una interrupción. Característica clave: marca cuánta velocidad de recuperación hay que comprar.</a:t>
+              <a:t>•  Cuantificación y continuidad comparten escenarios, dependencias y distribuciones; el objetivo no es una cifra exacta.</a:t>
+            </a:r>
+          </a:p>
+          <a:p>
+            <a:pPr>
+              <a:spcAft>
+                <a:spcPts val="600"/>
+              </a:spcAft>
+            </a:pPr>
+            <a:r>
+              <a:rPr sz="1500">
+                <a:solidFill>
+                  <a:srgbClr val="22282E"/>
+                </a:solidFill>
+              </a:rPr>
+              <a:t>•  Caso razonado. El promedio de interrupción oculta cola catastrófica; percentiles cambian la estrategia.</a:t>
             </a:r>
           </a:p>
         </p:txBody>
@@ -4301,7 +4827,7 @@
                   <a:srgbClr val="0B3D2E"/>
                 </a:solidFill>
               </a:rPr>
-              <a:t>🧰 Herramientas y preparación</a:t>
+              <a:t>📔 Glosario operativo complementario</a:t>
             </a:r>
           </a:p>
         </p:txBody>
@@ -4339,82 +4865,52 @@
                   <a:srgbClr val="22282E"/>
                 </a:solidFill>
               </a:rPr>
-              <a:t>•  Ejercicio analítico/GRC — no hay explotación; se construyen modelos con datos de tu propia organización o de un caso simulado:</a:t>
-            </a:r>
-          </a:p>
-          <a:p>
-            <a:pPr>
-              <a:spcAft>
-                <a:spcPts val="600"/>
-              </a:spcAft>
-            </a:pPr>
-            <a:r>
-              <a:rPr sz="1500">
-                <a:solidFill>
-                  <a:srgbClr val="22282E"/>
-                </a:solidFill>
-              </a:rPr>
-              <a:t>•  Hoja de cálculo (Excel/LibreOffice/Google Sheets) para SLE/ARO/ALE y tablas del BIA.</a:t>
-            </a:r>
-          </a:p>
-          <a:p>
-            <a:pPr>
-              <a:spcAft>
-                <a:spcPts val="600"/>
-              </a:spcAft>
-            </a:pPr>
-            <a:r>
-              <a:rPr sz="1500">
-                <a:solidFill>
-                  <a:srgbClr val="22282E"/>
-                </a:solidFill>
-              </a:rPr>
-              <a:t>•  Simulación de Monte Carlo: complemento como Data Table de Excel, o un script en Python con numpy (numpy.random.triangular, lognormal) y matplotlib para graficar la curva de pérdida.</a:t>
-            </a:r>
-          </a:p>
-          <a:p>
-            <a:pPr>
-              <a:spcAft>
-                <a:spcPts val="600"/>
-              </a:spcAft>
-            </a:pPr>
-            <a:r>
-              <a:rPr sz="1500">
-                <a:solidFill>
-                  <a:srgbClr val="22282E"/>
-                </a:solidFill>
-              </a:rPr>
-              <a:t>•  Plantilla FAIR: hoja con los factores de la taxonomía (LEF, TEF, Vulnerability, LM primaria y secundaria). La guía Open FAIR de The Open Group es la referencia pública.</a:t>
-            </a:r>
-          </a:p>
-          <a:p>
-            <a:pPr>
-              <a:spcAft>
-                <a:spcPts val="600"/>
-              </a:spcAft>
-            </a:pPr>
-            <a:r>
-              <a:rPr sz="1500">
-                <a:solidFill>
-                  <a:srgbClr val="22282E"/>
-                </a:solidFill>
-              </a:rPr>
-              <a:t>•  Plantilla de BIA: inventario de procesos, dependencias, impacto por ventana temporal, RTO/RPO/MTD.</a:t>
-            </a:r>
-          </a:p>
-          <a:p>
-            <a:pPr>
-              <a:spcAft>
-                <a:spcPts val="600"/>
-              </a:spcAft>
-            </a:pPr>
-            <a:r>
-              <a:rPr sz="1500">
-                <a:solidFill>
-                  <a:srgbClr val="22282E"/>
-                </a:solidFill>
-              </a:rPr>
-              <a:t>•  Fuentes de estimación reales: histórico de incidentes, informes de la industria (p. ej. estudios de coste de brecha), y opinión experta calibrada.</a:t>
+              <a:t>•  Término — Definición</a:t>
+            </a:r>
+          </a:p>
+          <a:p>
+            <a:pPr>
+              <a:spcAft>
+                <a:spcPts val="600"/>
+              </a:spcAft>
+            </a:pPr>
+            <a:r>
+              <a:rPr sz="1500">
+                <a:solidFill>
+                  <a:srgbClr val="22282E"/>
+                </a:solidFill>
+              </a:rPr>
+              <a:t>•  Evidencia — Información cuya procedencia y relación con un criterio pueden revisarse.</a:t>
+            </a:r>
+          </a:p>
+          <a:p>
+            <a:pPr>
+              <a:spcAft>
+                <a:spcPts val="600"/>
+              </a:spcAft>
+            </a:pPr>
+            <a:r>
+              <a:rPr sz="1500">
+                <a:solidFill>
+                  <a:srgbClr val="22282E"/>
+                </a:solidFill>
+              </a:rPr>
+              <a:t>•  Supuesto — Condición declarada de la que depende una conclusión.</a:t>
+            </a:r>
+          </a:p>
+          <a:p>
+            <a:pPr>
+              <a:spcAft>
+                <a:spcPts val="600"/>
+              </a:spcAft>
+            </a:pPr>
+            <a:r>
+              <a:rPr sz="1500">
+                <a:solidFill>
+                  <a:srgbClr val="22282E"/>
+                </a:solidFill>
+              </a:rPr>
+              <a:t>•  Riesgo residual — Exposición que permanece después del tratamiento.</a:t>
             </a:r>
           </a:p>
         </p:txBody>
@@ -4465,7 +4961,7 @@
                   <a:srgbClr val="0B3D2E"/>
                 </a:solidFill>
               </a:rPr>
-              <a:t>🧪 Laboratorio guiado — Modelar un riesgo con FAIR + Monte Carlo y derivar la continuidad</a:t>
+              <a:t>✅ Criterio de dominio</a:t>
             </a:r>
           </a:p>
         </p:txBody>
@@ -4503,97 +4999,7 @@
                   <a:srgbClr val="22282E"/>
                 </a:solidFill>
               </a:rPr>
-              <a:t>•  Ejercicio aplicado: cuantificas un riesgo de ransomware sobre un sistema crítico y usas el resultado para diseñar su continuidad.</a:t>
-            </a:r>
-          </a:p>
-          <a:p>
-            <a:pPr>
-              <a:spcAft>
-                <a:spcPts val="600"/>
-              </a:spcAft>
-            </a:pPr>
-            <a:r>
-              <a:rPr sz="1500">
-                <a:solidFill>
-                  <a:srgbClr val="22282E"/>
-                </a:solidFill>
-              </a:rPr>
-              <a:t>•  Define el escenario. Elige un activo (p. ej. la base de datos de pedidos), la amenaza (ransomware) y el efecto (indisponibilidad + posible exfiltración). Escríbelo en una frase de riesgo clara.</a:t>
-            </a:r>
-          </a:p>
-          <a:p>
-            <a:pPr>
-              <a:spcAft>
-                <a:spcPts val="600"/>
-              </a:spcAft>
-            </a:pPr>
-            <a:r>
-              <a:rPr sz="1500">
-                <a:solidFill>
-                  <a:srgbClr val="22282E"/>
-                </a:solidFill>
-              </a:rPr>
-              <a:t>•  Cálculo clásico ALE. Estima AV (valor del activo/proceso), EF (% de pérdida si ocurre) → SLE. Estima ARO a partir del histórico y la exposición → ALE = SLE × ARO. Anota los supuestos.</a:t>
-            </a:r>
-          </a:p>
-          <a:p>
-            <a:pPr>
-              <a:spcAft>
-                <a:spcPts val="600"/>
-              </a:spcAft>
-            </a:pPr>
-            <a:r>
-              <a:rPr sz="1500">
-                <a:solidFill>
-                  <a:srgbClr val="22282E"/>
-                </a:solidFill>
-              </a:rPr>
-              <a:t>•  Descompón con FAIR. Rellena la taxonomía: frecuencia de contacto/amenaza (TEF), vulnerabilidad, y magnitud de pérdida separando pérdida primaria (respuesta, restauración) y secundaria (multas, reputación, clientes).</a:t>
-            </a:r>
-          </a:p>
-          <a:p>
-            <a:pPr>
-              <a:spcAft>
-                <a:spcPts val="600"/>
-              </a:spcAft>
-            </a:pPr>
-            <a:r>
-              <a:rPr sz="1500">
-                <a:solidFill>
-                  <a:srgbClr val="22282E"/>
-                </a:solidFill>
-              </a:rPr>
-              <a:t>•  Asigna distribuciones. En lugar de puntos, define rangos calibrados (mínimo, más probable, máximo) para LEF y LM. Usa una distribución triangular o PERT.</a:t>
-            </a:r>
-          </a:p>
-          <a:p>
-            <a:pPr>
-              <a:spcAft>
-                <a:spcPts val="600"/>
-              </a:spcAft>
-            </a:pPr>
-            <a:r>
-              <a:rPr sz="1500">
-                <a:solidFill>
-                  <a:srgbClr val="22282E"/>
-                </a:solidFill>
-              </a:rPr>
-              <a:t>•  Corre Monte Carlo. Simula 10.000 iteraciones muestreando las distribuciones y multiplicando LEF × LM. Grafica el histograma y extrae media, percentil 50 y percentil 90 de la pérdida anual.</a:t>
-            </a:r>
-          </a:p>
-          <a:p>
-            <a:pPr>
-              <a:spcAft>
-                <a:spcPts val="600"/>
-              </a:spcAft>
-            </a:pPr>
-            <a:r>
-              <a:rPr sz="1500">
-                <a:solidFill>
-                  <a:srgbClr val="22282E"/>
-                </a:solidFill>
-              </a:rPr>
-              <a:t>•  Decide el control (ROSI). Propón un control (backups inmutables + segmentación). Estima cuánto reduce LEF o LM, recalcula el ALE mitigado y compara: ROSI = (ALEantes − ALEdespués − costecontrol) / costecontrol.</a:t>
+              <a:t>•  El alumno demuestra dominio cuando explica el diagrama, resuelve el caso con evidencia, declara límites y puede defender por qué su decisión cambia si cambia un supuesto.</a:t>
             </a:r>
           </a:p>
         </p:txBody>
@@ -4644,7 +5050,7 @@
                   <a:srgbClr val="0B3D2E"/>
                 </a:solidFill>
               </a:rPr>
-              <a:t>✍️ Ejercicios</a:t>
+              <a:t>📖 Definiciones y características</a:t>
             </a:r>
           </a:p>
         </p:txBody>
@@ -4682,82 +5088,97 @@
                   <a:srgbClr val="22282E"/>
                 </a:solidFill>
               </a:rPr>
-              <a:t>•  Calcula el ALE de un escenario dado (AV, EF, ARO) y explica qué pasa con el ALE si el ARO se duplica.</a:t>
-            </a:r>
-          </a:p>
-          <a:p>
-            <a:pPr>
-              <a:spcAft>
-                <a:spcPts val="600"/>
-              </a:spcAft>
-            </a:pPr>
-            <a:r>
-              <a:rPr sz="1500">
-                <a:solidFill>
-                  <a:srgbClr val="22282E"/>
-                </a:solidFill>
-              </a:rPr>
-              <a:t>•  Descompón un riesgo de fuga de datos con la taxonomía FAIR, separando pérdida primaria y secundaria.</a:t>
-            </a:r>
-          </a:p>
-          <a:p>
-            <a:pPr>
-              <a:spcAft>
-                <a:spcPts val="600"/>
-              </a:spcAft>
-            </a:pPr>
-            <a:r>
-              <a:rPr sz="1500">
-                <a:solidFill>
-                  <a:srgbClr val="22282E"/>
-                </a:solidFill>
-              </a:rPr>
-              <a:t>•  Justifica por qué un único número de pérdida es engañoso y qué aporta reportar el percentil 90.</a:t>
-            </a:r>
-          </a:p>
-          <a:p>
-            <a:pPr>
-              <a:spcAft>
-                <a:spcPts val="600"/>
-              </a:spcAft>
-            </a:pPr>
-            <a:r>
-              <a:rPr sz="1500">
-                <a:solidFill>
-                  <a:srgbClr val="22282E"/>
-                </a:solidFill>
-              </a:rPr>
-              <a:t>•  Construye un mini Monte Carlo (100 filas en hoja de cálculo o 20 líneas de Python) para una pérdida triangular.</a:t>
-            </a:r>
-          </a:p>
-          <a:p>
-            <a:pPr>
-              <a:spcAft>
-                <a:spcPts val="600"/>
-              </a:spcAft>
-            </a:pPr>
-            <a:r>
-              <a:rPr sz="1500">
-                <a:solidFill>
-                  <a:srgbClr val="22282E"/>
-                </a:solidFill>
-              </a:rPr>
-              <a:t>•  Dado un proceso con MTD de 24 h, propón RTO y RPO coherentes y la estrategia de sitio que los cumple.</a:t>
-            </a:r>
-          </a:p>
-          <a:p>
-            <a:pPr>
-              <a:spcAft>
-                <a:spcPts val="600"/>
-              </a:spcAft>
-            </a:pPr>
-            <a:r>
-              <a:rPr sz="1500">
-                <a:solidFill>
-                  <a:srgbClr val="22282E"/>
-                </a:solidFill>
-              </a:rPr>
-              <a:t>•  Compara tres controles por su ROSI y recomienda cuál financiar primero.</a:t>
+              <a:t>•  SLE (Single Loss Expectancy): pérdida esperada de un solo evento. SLE = valor del activo (AV) × factor de exposición (EF). Característica clave: mide el impacto de un incidente, no del año.</a:t>
+            </a:r>
+          </a:p>
+          <a:p>
+            <a:pPr>
+              <a:spcAft>
+                <a:spcPts val="600"/>
+              </a:spcAft>
+            </a:pPr>
+            <a:r>
+              <a:rPr sz="1500">
+                <a:solidFill>
+                  <a:srgbClr val="22282E"/>
+                </a:solidFill>
+              </a:rPr>
+              <a:t>•  ARO (Annualized Rate of Occurrence): número esperado de veces que el evento ocurre en un año (p. ej. 0,1 = una vez cada diez años). Característica clave: expresa la frecuencia como tasa anual.</a:t>
+            </a:r>
+          </a:p>
+          <a:p>
+            <a:pPr>
+              <a:spcAft>
+                <a:spcPts val="600"/>
+              </a:spcAft>
+            </a:pPr>
+            <a:r>
+              <a:rPr sz="1500">
+                <a:solidFill>
+                  <a:srgbClr val="22282E"/>
+                </a:solidFill>
+              </a:rPr>
+              <a:t>•  ALE (Annualized Loss Expectancy): pérdida esperada por año. ALE = SLE × ARO. Característica clave: es la métrica que se compara contra el coste de los controles.</a:t>
+            </a:r>
+          </a:p>
+          <a:p>
+            <a:pPr>
+              <a:spcAft>
+                <a:spcPts val="600"/>
+              </a:spcAft>
+            </a:pPr>
+            <a:r>
+              <a:rPr sz="1500">
+                <a:solidFill>
+                  <a:srgbClr val="22282E"/>
+                </a:solidFill>
+              </a:rPr>
+              <a:t>•  FAIR: marco abierto (The Open Group) que descompone el Riesgo = Frecuencia de eventos de pérdida (LEF) × Magnitud de pérdida (LM), y a su vez LEF en frecuencia de amenaza y vulnerabilidad.…</a:t>
+            </a:r>
+          </a:p>
+          <a:p>
+            <a:pPr>
+              <a:spcAft>
+                <a:spcPts val="600"/>
+              </a:spcAft>
+            </a:pPr>
+            <a:r>
+              <a:rPr sz="1500">
+                <a:solidFill>
+                  <a:srgbClr val="22282E"/>
+                </a:solidFill>
+              </a:rPr>
+              <a:t>•  Monte Carlo: técnica que muestrea miles de veces las distribuciones de entrada para producir una distribución de salida. Característica clave: entrega percentiles (p. ej. pérdida en el percentil 90)…</a:t>
+            </a:r>
+          </a:p>
+          <a:p>
+            <a:pPr>
+              <a:spcAft>
+                <a:spcPts val="600"/>
+              </a:spcAft>
+            </a:pPr>
+            <a:r>
+              <a:rPr sz="1500">
+                <a:solidFill>
+                  <a:srgbClr val="22282E"/>
+                </a:solidFill>
+              </a:rPr>
+              <a:t>•  BIA (Business Impact Analysis): análisis que identifica procesos críticos y el impacto —económico, legal, reputacional— de su interrupción en el tiempo. Característica clave: es la entrada que…</a:t>
+            </a:r>
+          </a:p>
+          <a:p>
+            <a:pPr>
+              <a:spcAft>
+                <a:spcPts val="600"/>
+              </a:spcAft>
+            </a:pPr>
+            <a:r>
+              <a:rPr sz="1500">
+                <a:solidFill>
+                  <a:srgbClr val="22282E"/>
+                </a:solidFill>
+              </a:rPr>
+              <a:t>•  RTO (Recovery Time Objective): tiempo máximo tolerable para restaurar un proceso tras una interrupción. Característica clave: marca cuánta velocidad de recuperación hay que comprar.</a:t>
             </a:r>
           </a:p>
         </p:txBody>
@@ -4808,7 +5229,7 @@
                   <a:srgbClr val="0B3D2E"/>
                 </a:solidFill>
               </a:rPr>
-              <a:t>📝 Reto verificable</a:t>
+              <a:t>🧰 Herramientas y preparación</a:t>
             </a:r>
           </a:p>
         </p:txBody>
@@ -4846,97 +5267,82 @@
                   <a:srgbClr val="22282E"/>
                 </a:solidFill>
               </a:rPr>
-              <a:t>•  Reto: entrega un análisis de riesgo cuantitativo de un proceso crítico que termine en una estrategia de continuidad justificada.</a:t>
-            </a:r>
-          </a:p>
-          <a:p>
-            <a:pPr>
-              <a:spcAft>
-                <a:spcPts val="600"/>
-              </a:spcAft>
-            </a:pPr>
-            <a:r>
-              <a:rPr sz="1500">
-                <a:solidFill>
-                  <a:srgbClr val="22282E"/>
-                </a:solidFill>
-              </a:rPr>
-              <a:t>•  Criterio de aceptación:</a:t>
-            </a:r>
-          </a:p>
-          <a:p>
-            <a:pPr>
-              <a:spcAft>
-                <a:spcPts val="600"/>
-              </a:spcAft>
-            </a:pPr>
-            <a:r>
-              <a:rPr sz="1500">
-                <a:solidFill>
-                  <a:srgbClr val="22282E"/>
-                </a:solidFill>
-              </a:rPr>
-              <a:t>•  Hay un ALE clásico (SLE × ARO) con supuestos documentados y un modelo FAIR de los mismos factores.</a:t>
-            </a:r>
-          </a:p>
-          <a:p>
-            <a:pPr>
-              <a:spcAft>
-                <a:spcPts val="600"/>
-              </a:spcAft>
-            </a:pPr>
-            <a:r>
-              <a:rPr sz="1500">
-                <a:solidFill>
-                  <a:srgbClr val="22282E"/>
-                </a:solidFill>
-              </a:rPr>
-              <a:t>•  La incertidumbre se modela con distribuciones y una simulación de Monte Carlo, reportando al menos el percentil 90 de pérdida anual.</a:t>
-            </a:r>
-          </a:p>
-          <a:p>
-            <a:pPr>
-              <a:spcAft>
-                <a:spcPts val="600"/>
-              </a:spcAft>
-            </a:pPr>
-            <a:r>
-              <a:rPr sz="1500">
-                <a:solidFill>
-                  <a:srgbClr val="22282E"/>
-                </a:solidFill>
-              </a:rPr>
-              <a:t>•  Existe un análisis ROSI que compara el coste del control contra la reducción de ALE, con una recomendación clara.</a:t>
-            </a:r>
-          </a:p>
-          <a:p>
-            <a:pPr>
-              <a:spcAft>
-                <a:spcPts val="600"/>
-              </a:spcAft>
-            </a:pPr>
-            <a:r>
-              <a:rPr sz="1500">
-                <a:solidFill>
-                  <a:srgbClr val="22282E"/>
-                </a:solidFill>
-              </a:rPr>
-              <a:t>•  El BIA deriva RTO, RPO y MTD del proceso, y se verifica que RTO ≤ MTD.</a:t>
-            </a:r>
-          </a:p>
-          <a:p>
-            <a:pPr>
-              <a:spcAft>
-                <a:spcPts val="600"/>
-              </a:spcAft>
-            </a:pPr>
-            <a:r>
-              <a:rPr sz="1500">
-                <a:solidFill>
-                  <a:srgbClr val="22282E"/>
-                </a:solidFill>
-              </a:rPr>
-              <a:t>•  La estrategia de continuidad/DR (sitio, backups, orden de recuperación) es coherente con los RTO/RPO y su coste se justifica frente al ALE.</a:t>
+              <a:t>•  Ejercicio analítico/GRC — no hay explotación; se construyen modelos con datos de tu propia organización o de un caso simulado:</a:t>
+            </a:r>
+          </a:p>
+          <a:p>
+            <a:pPr>
+              <a:spcAft>
+                <a:spcPts val="600"/>
+              </a:spcAft>
+            </a:pPr>
+            <a:r>
+              <a:rPr sz="1500">
+                <a:solidFill>
+                  <a:srgbClr val="22282E"/>
+                </a:solidFill>
+              </a:rPr>
+              <a:t>•  Hoja de cálculo (Excel/LibreOffice/Google Sheets) para SLE/ARO/ALE y tablas del BIA.</a:t>
+            </a:r>
+          </a:p>
+          <a:p>
+            <a:pPr>
+              <a:spcAft>
+                <a:spcPts val="600"/>
+              </a:spcAft>
+            </a:pPr>
+            <a:r>
+              <a:rPr sz="1500">
+                <a:solidFill>
+                  <a:srgbClr val="22282E"/>
+                </a:solidFill>
+              </a:rPr>
+              <a:t>•  Simulación de Monte Carlo: complemento como Data Table de Excel, o un script en Python con numpy (numpy.random.triangular, lognormal) y matplotlib para graficar la curva de pérdida.</a:t>
+            </a:r>
+          </a:p>
+          <a:p>
+            <a:pPr>
+              <a:spcAft>
+                <a:spcPts val="600"/>
+              </a:spcAft>
+            </a:pPr>
+            <a:r>
+              <a:rPr sz="1500">
+                <a:solidFill>
+                  <a:srgbClr val="22282E"/>
+                </a:solidFill>
+              </a:rPr>
+              <a:t>•  Plantilla FAIR: hoja con los factores de la taxonomía (LEF, TEF, Vulnerability, LM primaria y secundaria). La guía Open FAIR de The Open Group es la referencia pública.</a:t>
+            </a:r>
+          </a:p>
+          <a:p>
+            <a:pPr>
+              <a:spcAft>
+                <a:spcPts val="600"/>
+              </a:spcAft>
+            </a:pPr>
+            <a:r>
+              <a:rPr sz="1500">
+                <a:solidFill>
+                  <a:srgbClr val="22282E"/>
+                </a:solidFill>
+              </a:rPr>
+              <a:t>•  Plantilla de BIA: inventario de procesos, dependencias, impacto por ventana temporal, RTO/RPO/MTD.</a:t>
+            </a:r>
+          </a:p>
+          <a:p>
+            <a:pPr>
+              <a:spcAft>
+                <a:spcPts val="600"/>
+              </a:spcAft>
+            </a:pPr>
+            <a:r>
+              <a:rPr sz="1500">
+                <a:solidFill>
+                  <a:srgbClr val="22282E"/>
+                </a:solidFill>
+              </a:rPr>
+              <a:t>•  Fuentes de estimación reales: histórico de incidentes, informes de la industria (p. ej. estudios de coste de brecha), y opinión experta calibrada.</a:t>
             </a:r>
           </a:p>
         </p:txBody>
